--- a/diagrams/aug/scores/meteor.pptx
+++ b/diagrams/aug/scores/meteor.pptx
@@ -3105,7 +3105,7 @@
         <p:spPr>
           <a:xfrm>
             <a:off x="457200" y="457200"/>
-            <a:ext cx="11430000" cy="5941337"/>
+            <a:ext cx="11430000" cy="7243502"/>
           </a:xfrm>
           <a:prstGeom prst="rect">
             <a:avLst/>

--- a/diagrams/aug/scores/meteor.pptx
+++ b/diagrams/aug/scores/meteor.pptx
@@ -3105,7 +3105,7 @@
         <p:spPr>
           <a:xfrm>
             <a:off x="457200" y="457200"/>
-            <a:ext cx="11430000" cy="7243502"/>
+            <a:ext cx="11430000" cy="7156385"/>
           </a:xfrm>
           <a:prstGeom prst="rect">
             <a:avLst/>
